--- a/decks/hist-tudors/hist-tudors_ch6_biggest-change.pptx
+++ b/decks/hist-tudors/hist-tudors_ch6_biggest-change.pptx
@@ -124,29 +124,29 @@
   <p:extLst>
     <p:ext uri="{521415D9-36F7-43E2-AB2F-B90AF26B5E84}">
       <p14:sectionLst xmlns:p14="http://schemas.microsoft.com/office/powerpoint/2010/main">
-        <p14:section name="Opening" id="{572acb55-d8aa-2650-b0c1-5a02875adc24}">
+        <p14:section name="Opening" id="{c42aa2bf-4755-48e0-1855-9e8b0c4a3493}">
           <p14:sldIdLst>
             <p14:sldId id="256"/>
           </p14:sldIdLst>
         </p14:section>
-        <p14:section name="Gate" id="{8facdbc8-814c-47b9-53c7-e0eadd5161a1}">
+        <p14:section name="Gate" id="{a6f959a1-3076-2ce4-ec33-ffb80ade433f}">
           <p14:sldIdLst>
             <p14:sldId id="257"/>
             <p14:sldId id="258"/>
           </p14:sldIdLst>
         </p14:section>
-        <p14:section name="Pre-teach" id="{71b9ecbd-ec2e-6657-f806-768d0058ff98}">
+        <p14:section name="Pre-teach" id="{01e52af0-3d2a-1f3a-0232-2f6686e08577}">
           <p14:sldIdLst>
             <p14:sldId id="259"/>
           </p14:sldIdLst>
         </p14:section>
-        <p14:section name="Read-along" id="{2faf06b3-eed2-39a7-a3fe-53ae6b9808cc}">
+        <p14:section name="Read-along" id="{5f3aef89-1ab5-e9b5-39d3-ccfd71d0fd13}">
           <p14:sldIdLst>
             <p14:sldId id="260"/>
             <p14:sldId id="261"/>
           </p14:sldIdLst>
         </p14:section>
-        <p14:section name="Teach" id="{ac209047-9f3d-28b2-693f-77df795d8c65}">
+        <p14:section name="Teach" id="{f0d78211-923b-2690-2094-a161cef4bfe3}">
           <p14:sldIdLst>
             <p14:sldId id="262"/>
             <p14:sldId id="263"/>
@@ -154,7 +154,7 @@
             <p14:sldId id="265"/>
           </p14:sldIdLst>
         </p14:section>
-        <p14:section name="Routes" id="{4d5b986c-18bb-0203-90c5-c85d3fb43472}">
+        <p14:section name="Routes" id="{123c3301-0440-860d-034a-b9d1666c3861}">
           <p14:sldIdLst>
             <p14:sldId id="266"/>
             <p14:sldId id="267"/>
@@ -162,12 +162,12 @@
             <p14:sldId id="269"/>
           </p14:sldIdLst>
         </p14:section>
-        <p14:section name="Close" id="{8c4f4077-ced4-cd6c-be13-0f3e5177cd40}">
+        <p14:section name="Close" id="{1b3a5e3f-9003-2489-442f-df6596e268dc}">
           <p14:sldIdLst>
             <p14:sldId id="270"/>
           </p14:sldIdLst>
         </p14:section>
-        <p14:section name="Answers" id="{c537b197-4236-dd47-bb7e-97221d189147}">
+        <p14:section name="Answers" id="{7ec02c6f-5907-59ce-8c51-72e2baa182fc}">
           <p14:sldIdLst>
             <p14:sldId id="271"/>
             <p14:sldId id="272"/>
@@ -1979,7 +1979,7 @@
               <a:t>Teach — Four monarchs, four policies. Say it in your own words, then check understanding with a quick question: ask a pupil from the pre-teach group first, since they met these words and ideas before the lesson. Pupils try to recall before you re-explain.
 Henry VIII (code H in your bell work): the Act of Supremacy of 1534 made him Supreme Head of the Church of England; he began the Dissolution of the Monasteries from 1536; he destroyed Becket's shrine; the Pope excommunicated him in 1538. Yet services stayed Catholic and Henry died a Catholic. Edward VI (E): the first Protestant king; plain churches with paintings and decorations destroyed; a new prayer book in English.
 Mary I (M): heresy laws; Latin prayer books and decorated churches brought back; about 300 Protestants burned at the stake; marriage to Philip II of Spain. Elizabeth I (EL): the Middle Way; the Act of Supremacy of 1559 making her Supreme Governor; the Act of Uniformity; the Common Prayer Book in English.
-Your review sheet lists nine changes for a Diamond of 9: Act of Supremacy, Dissolution of the Monasteries, English Prayer Book, Burning Protestants, Middle Way, Act of Uniformity, Excommunication, Heresy Laws, Supreme Governor. Before you rank them, make sure you can say which monarch each belongs to.
+Your review sheet lists nine changes for a Diamond of 9: Act of Supremacy, Excommunication, Dissolution of the Monasteries, English Prayer Book, Heresy Laws, Burning Protestants, Act of Uniformity, Supreme Governor, Middle Way. Before you rank them, make sure you can say which monarch each belongs to.
 Tip: Bingo words to recognise: Excommunication (Henry), English (Edward's prayer book), Burnt at the Stake (Mary), Supreme Governor and the Middle Way (Elizabeth), Lady Jane Grey (1553), Jane Seymour (Edward's mother).</a:t>
             </a:r>
             <a:endParaRPr lang="en-US" dirty="0"/>
@@ -15126,7 +15126,7 @@
                 <a:ea typeface="Calibri" pitchFamily="34" charset="-122"/>
                 <a:cs typeface="Calibri" pitchFamily="34" charset="-120"/>
               </a:rPr>
-              <a:t>Your review sheet lists nine changes for a Diamond of 9: Act of Supremacy, Dissolution of the Monasteries, English Prayer Book, Burning Protestants, Middle Way, Act of Uniformity, Excommunication, Heresy Laws, Supreme Governor.</a:t>
+              <a:t>Your review sheet lists nine changes for a Diamond of 9: Act of Supremacy, Excommunication, Dissolution of the Monasteries, English Prayer Book, Heresy Laws, Burning Protestants, Act of Uniformity, Supreme Governor, Middle Way.</a:t>
             </a:r>
             <a:endParaRPr lang="en-US" sz="2200" dirty="0"/>
           </a:p>
